--- a/documentos/Banner_Grupo4/Banner_FECAP_ADSB_Grupo4.pptx
+++ b/documentos/Banner_Grupo4/Banner_FECAP_ADSB_Grupo4.pptx
@@ -265,7 +265,7 @@
       </p15:sldGuideLst>
     </p:ext>
     <p:ext uri="GoogleSlidesCustomDataVersion2">
-      <go:slidesCustomData xmlns="" xmlns:mc="http://schemas.openxmlformats.org/markup-compatibility/2006" xmlns:mv="urn:schemas-microsoft-com:mac:vml" xmlns:c="http://schemas.openxmlformats.org/drawingml/2006/chart" xmlns:dgm="http://schemas.openxmlformats.org/drawingml/2006/diagram" xmlns:o="urn:schemas-microsoft-com:office:office" xmlns:v="urn:schemas-microsoft-com:vml" xmlns:pvml="urn:schemas-microsoft-com:office:powerpoint" xmlns:com="http://schemas.openxmlformats.org/drawingml/2006/compatibility" xmlns:p14="http://schemas.microsoft.com/office/powerpoint/2010/main" xmlns:p15="http://schemas.microsoft.com/office/powerpoint/2012/main" xmlns:ahyp="http://schemas.microsoft.com/office/drawing/2018/hyperlinkcolor" xmlns:go="http://customooxmlschemas.google.com/" r:id="rId13" roundtripDataSignature="AMtx7mi+9yr4mDS8zg5+kfXTqvtBuST67g=="/>
+      <go:slidesCustomData xmlns:go="http://customooxmlschemas.google.com/" xmlns:ahyp="http://schemas.microsoft.com/office/drawing/2018/hyperlinkcolor" xmlns:p15="http://schemas.microsoft.com/office/powerpoint/2012/main" xmlns:p14="http://schemas.microsoft.com/office/powerpoint/2010/main" xmlns:com="http://schemas.openxmlformats.org/drawingml/2006/compatibility" xmlns:pvml="urn:schemas-microsoft-com:office:powerpoint" xmlns:v="urn:schemas-microsoft-com:vml" xmlns:o="urn:schemas-microsoft-com:office:office" xmlns:dgm="http://schemas.openxmlformats.org/drawingml/2006/diagram" xmlns:c="http://schemas.openxmlformats.org/drawingml/2006/chart" xmlns:mv="urn:schemas-microsoft-com:mac:vml" xmlns:mc="http://schemas.openxmlformats.org/markup-compatibility/2006" xmlns="" r:id="rId13" roundtripDataSignature="AMtx7mi+9yr4mDS8zg5+kfXTqvtBuST67g=="/>
     </p:ext>
   </p:extLst>
 </p:presentation>
@@ -12820,7 +12820,7 @@
               <a:t>Orientadores: </a:t>
             </a:r>
             <a:r>
-              <a:rPr lang="en-US" sz="4762" b="1" dirty="0">
+              <a:rPr lang="en-US" sz="4762" dirty="0">
                 <a:latin typeface="Open Sans"/>
                 <a:ea typeface="Open Sans"/>
                 <a:cs typeface="Open Sans"/>
@@ -13201,8 +13201,23 @@
                 <a:cs typeface="Open Sans"/>
                 <a:sym typeface="Open Sans"/>
               </a:rPr>
-              <a:t>Interface: WinForms / WPF </a:t>
-            </a:r>
+              <a:t>Interface: </a:t>
+            </a:r>
+            <a:r>
+              <a:rPr lang="en-US" sz="3430">
+                <a:latin typeface="Open Sans"/>
+                <a:ea typeface="Open Sans"/>
+                <a:cs typeface="Open Sans"/>
+                <a:sym typeface="Open Sans"/>
+              </a:rPr>
+              <a:t>WinForms </a:t>
+            </a:r>
+            <a:endParaRPr lang="en-US" sz="3430" dirty="0">
+              <a:latin typeface="Open Sans"/>
+              <a:ea typeface="Open Sans"/>
+              <a:cs typeface="Open Sans"/>
+              <a:sym typeface="Open Sans"/>
+            </a:endParaRPr>
           </a:p>
           <a:p>
             <a:pPr marL="740593" marR="0" lvl="1" indent="-370297" algn="just" rtl="0">
@@ -15942,58 +15957,6 @@
           </a:prstGeom>
         </p:spPr>
       </p:pic>
-      <p:sp>
-        <p:nvSpPr>
-          <p:cNvPr id="18" name="Seta: Dobrada para Cima 17">
-            <a:extLst>
-              <a:ext uri="{FF2B5EF4-FFF2-40B4-BE49-F238E27FC236}">
-                <a16:creationId xmlns:a16="http://schemas.microsoft.com/office/drawing/2014/main" id="{EDD61873-57B5-8655-C606-077B5BC7F7FB}"/>
-              </a:ext>
-            </a:extLst>
-          </p:cNvPr>
-          <p:cNvSpPr/>
-          <p:nvPr/>
-        </p:nvSpPr>
-        <p:spPr>
-          <a:xfrm rot="5400000">
-            <a:off x="20193000" y="33447175"/>
-            <a:ext cx="1304164" cy="1262844"/>
-          </a:xfrm>
-          <a:prstGeom prst="bentUpArrow">
-            <a:avLst/>
-          </a:prstGeom>
-          <a:solidFill>
-            <a:srgbClr val="33FF33"/>
-          </a:solidFill>
-          <a:ln>
-            <a:noFill/>
-          </a:ln>
-        </p:spPr>
-        <p:style>
-          <a:lnRef idx="2">
-            <a:schemeClr val="accent1">
-              <a:shade val="15000"/>
-            </a:schemeClr>
-          </a:lnRef>
-          <a:fillRef idx="1">
-            <a:schemeClr val="accent1"/>
-          </a:fillRef>
-          <a:effectRef idx="0">
-            <a:schemeClr val="accent1"/>
-          </a:effectRef>
-          <a:fontRef idx="minor">
-            <a:schemeClr val="lt1"/>
-          </a:fontRef>
-        </p:style>
-        <p:txBody>
-          <a:bodyPr rtlCol="0" anchor="ctr"/>
-          <a:lstStyle/>
-          <a:p>
-            <a:pPr algn="ctr"/>
-            <a:endParaRPr lang="pt-BR"/>
-          </a:p>
-        </p:txBody>
-      </p:sp>
     </p:spTree>
   </p:cSld>
   <p:clrMapOvr>
